--- a/docs/GitHub_Copilot_MultiAgent_Demo.pptx
+++ b/docs/GitHub_Copilot_MultiAgent_Demo.pptx
@@ -6336,7 +6336,7 @@
         </p:nvSpPr>
         <p:spPr>
           <a:xfrm>
-            <a:off x="457200" y="1188720"/>
+            <a:off x="457200" y="1028700"/>
             <a:ext cx="4023360" cy="3108960"/>
           </a:xfrm>
           <a:prstGeom prst="rect">
@@ -6420,7 +6420,23 @@
                 <a:ea typeface="Calibri" pitchFamily="34" charset="-122"/>
                 <a:cs typeface="Calibri" pitchFamily="34" charset="-120"/>
               </a:rPr>
-              <a:t>Development Time
+              <a:t>Development Time</a:t>
+            </a:r>
+          </a:p>
+          <a:p>
+            <a:pPr marL="0" indent="0" algn="ctr">
+              <a:buNone/>
+            </a:pPr>
+            <a:r>
+              <a:rPr lang="en-US" sz="1400" b="1" dirty="0">
+                <a:solidFill>
+                  <a:srgbClr val="1E2761"/>
+                </a:solidFill>
+                <a:latin typeface="Calibri" pitchFamily="34" charset="0"/>
+                <a:ea typeface="Calibri" pitchFamily="34" charset="-122"/>
+                <a:cs typeface="Calibri" pitchFamily="34" charset="-120"/>
+              </a:rPr>
+              <a:t>
 </a:t>
             </a:r>
             <a:endParaRPr lang="en-US" sz="1400" dirty="0"/>
@@ -6560,7 +6576,7 @@
         </p:nvSpPr>
         <p:spPr>
           <a:xfrm>
-            <a:off x="4663440" y="1188720"/>
+            <a:off x="4572000" y="1028700"/>
             <a:ext cx="4023360" cy="3108960"/>
           </a:xfrm>
           <a:prstGeom prst="rect">
@@ -6580,7 +6596,7 @@
         </p:nvSpPr>
         <p:spPr>
           <a:xfrm>
-            <a:off x="4663440" y="1371600"/>
+            <a:off x="4663440" y="1271311"/>
             <a:ext cx="4023360" cy="365760"/>
           </a:xfrm>
           <a:prstGeom prst="rect">
